--- a/PowerPoint/service-overview.pptx
+++ b/PowerPoint/service-overview.pptx
@@ -201,7 +201,7 @@
           <a:p>
             <a:fld id="{5C6F0509-8D02-0F40-AC00-6A633D6E7202}" type="datetimeFigureOut">
               <a:rPr kumimoji="1" lang="ja-JP" altLang="en-US" smtClean="0"/>
-              <a:t>2026/9/10</a:t>
+              <a:t>2026/9/11</a:t>
             </a:fld>
             <a:endParaRPr kumimoji="1" lang="ja-JP" altLang="en-US"/>
           </a:p>
@@ -734,7 +734,7 @@
           <a:p>
             <a:fld id="{FA53EF3D-1DFB-8245-BD00-4C84700CC98F}" type="datetimeFigureOut">
               <a:rPr kumimoji="1" lang="ja-JP" altLang="en-US" smtClean="0"/>
-              <a:t>2026/9/10</a:t>
+              <a:t>2026/9/11</a:t>
             </a:fld>
             <a:endParaRPr kumimoji="1" lang="ja-JP" altLang="en-US"/>
           </a:p>
@@ -964,7 +964,7 @@
           <a:p>
             <a:fld id="{FA53EF3D-1DFB-8245-BD00-4C84700CC98F}" type="datetimeFigureOut">
               <a:rPr kumimoji="1" lang="ja-JP" altLang="en-US" smtClean="0"/>
-              <a:t>2026/9/10</a:t>
+              <a:t>2026/9/11</a:t>
             </a:fld>
             <a:endParaRPr kumimoji="1" lang="ja-JP" altLang="en-US"/>
           </a:p>
@@ -1204,7 +1204,7 @@
           <a:p>
             <a:fld id="{FA53EF3D-1DFB-8245-BD00-4C84700CC98F}" type="datetimeFigureOut">
               <a:rPr kumimoji="1" lang="ja-JP" altLang="en-US" smtClean="0"/>
-              <a:t>2026/9/10</a:t>
+              <a:t>2026/9/11</a:t>
             </a:fld>
             <a:endParaRPr kumimoji="1" lang="ja-JP" altLang="en-US"/>
           </a:p>
@@ -1434,7 +1434,7 @@
           <a:p>
             <a:fld id="{FA53EF3D-1DFB-8245-BD00-4C84700CC98F}" type="datetimeFigureOut">
               <a:rPr kumimoji="1" lang="ja-JP" altLang="en-US" smtClean="0"/>
-              <a:t>2026/9/10</a:t>
+              <a:t>2026/9/11</a:t>
             </a:fld>
             <a:endParaRPr kumimoji="1" lang="ja-JP" altLang="en-US"/>
           </a:p>
@@ -1709,7 +1709,7 @@
           <a:p>
             <a:fld id="{FA53EF3D-1DFB-8245-BD00-4C84700CC98F}" type="datetimeFigureOut">
               <a:rPr kumimoji="1" lang="ja-JP" altLang="en-US" smtClean="0"/>
-              <a:t>2026/9/10</a:t>
+              <a:t>2026/9/11</a:t>
             </a:fld>
             <a:endParaRPr kumimoji="1" lang="ja-JP" altLang="en-US"/>
           </a:p>
@@ -2038,7 +2038,7 @@
           <a:p>
             <a:fld id="{FA53EF3D-1DFB-8245-BD00-4C84700CC98F}" type="datetimeFigureOut">
               <a:rPr kumimoji="1" lang="ja-JP" altLang="en-US" smtClean="0"/>
-              <a:t>2026/9/10</a:t>
+              <a:t>2026/9/11</a:t>
             </a:fld>
             <a:endParaRPr kumimoji="1" lang="ja-JP" altLang="en-US"/>
           </a:p>
@@ -2514,7 +2514,7 @@
           <a:p>
             <a:fld id="{FA53EF3D-1DFB-8245-BD00-4C84700CC98F}" type="datetimeFigureOut">
               <a:rPr kumimoji="1" lang="ja-JP" altLang="en-US" smtClean="0"/>
-              <a:t>2026/9/10</a:t>
+              <a:t>2026/9/11</a:t>
             </a:fld>
             <a:endParaRPr kumimoji="1" lang="ja-JP" altLang="en-US"/>
           </a:p>
@@ -2655,7 +2655,7 @@
           <a:p>
             <a:fld id="{FA53EF3D-1DFB-8245-BD00-4C84700CC98F}" type="datetimeFigureOut">
               <a:rPr kumimoji="1" lang="ja-JP" altLang="en-US" smtClean="0"/>
-              <a:t>2026/9/10</a:t>
+              <a:t>2026/9/11</a:t>
             </a:fld>
             <a:endParaRPr kumimoji="1" lang="ja-JP" altLang="en-US"/>
           </a:p>
@@ -2768,7 +2768,7 @@
           <a:p>
             <a:fld id="{FA53EF3D-1DFB-8245-BD00-4C84700CC98F}" type="datetimeFigureOut">
               <a:rPr kumimoji="1" lang="ja-JP" altLang="en-US" smtClean="0"/>
-              <a:t>2026/9/10</a:t>
+              <a:t>2026/9/11</a:t>
             </a:fld>
             <a:endParaRPr kumimoji="1" lang="ja-JP" altLang="en-US"/>
           </a:p>
@@ -3111,7 +3111,7 @@
           <a:p>
             <a:fld id="{FA53EF3D-1DFB-8245-BD00-4C84700CC98F}" type="datetimeFigureOut">
               <a:rPr kumimoji="1" lang="ja-JP" altLang="en-US" smtClean="0"/>
-              <a:t>2026/9/10</a:t>
+              <a:t>2026/9/11</a:t>
             </a:fld>
             <a:endParaRPr kumimoji="1" lang="ja-JP" altLang="en-US"/>
           </a:p>
@@ -3399,7 +3399,7 @@
           <a:p>
             <a:fld id="{FA53EF3D-1DFB-8245-BD00-4C84700CC98F}" type="datetimeFigureOut">
               <a:rPr kumimoji="1" lang="ja-JP" altLang="en-US" smtClean="0"/>
-              <a:t>2026/9/10</a:t>
+              <a:t>2026/9/11</a:t>
             </a:fld>
             <a:endParaRPr kumimoji="1" lang="ja-JP" altLang="en-US"/>
           </a:p>
@@ -3672,7 +3672,7 @@
           <a:p>
             <a:fld id="{FA53EF3D-1DFB-8245-BD00-4C84700CC98F}" type="datetimeFigureOut">
               <a:rPr kumimoji="1" lang="ja-JP" altLang="en-US" smtClean="0"/>
-              <a:t>2026/9/10</a:t>
+              <a:t>2026/9/11</a:t>
             </a:fld>
             <a:endParaRPr kumimoji="1" lang="ja-JP" altLang="en-US"/>
           </a:p>
@@ -6170,15 +6170,7 @@
             </a:r>
             <a:r>
               <a:rPr kumimoji="1" lang="en-US" altLang="ja-JP" sz="1400" dirty="0"/>
-              <a:t>4-</a:t>
-            </a:r>
-            <a:r>
-              <a:rPr lang="en-US" altLang="ja-JP" sz="1400" dirty="0"/>
-              <a:t>2</a:t>
-            </a:r>
-            <a:r>
-              <a:rPr kumimoji="1" lang="en-US" altLang="ja-JP" sz="1400" dirty="0"/>
-              <a:t>. </a:t>
+              <a:t>4-3. </a:t>
             </a:r>
             <a:r>
               <a:rPr lang="ja-JP" altLang="en-US" sz="1400"/>
